--- a/docs/Final_Defense_Presentation.pptx
+++ b/docs/Final_Defense_Presentation.pptx
@@ -3627,7 +3627,7 @@
                 <a:ea typeface="Courier New" pitchFamily="34" charset="-122"/>
                 <a:cs typeface="Courier New" pitchFamily="34" charset="-120"/>
               </a:rPr>
-              <a:t>└── tests/            35 tests</a:t>
+              <a:t>└── tests/            36 tests</a:t>
             </a:r>
             <a:endParaRPr lang="en-US" sz="1100" dirty="0"/>
           </a:p>
@@ -5285,7 +5285,7 @@
                 <a:ea typeface="Calibri" pitchFamily="34" charset="-122"/>
                 <a:cs typeface="Calibri" pitchFamily="34" charset="-120"/>
               </a:rPr>
-              <a:t>College is selected and an identity document is uploaded</a:t>
+              <a:t>College is selected and one PDF with NID, resume and documents is uploaded</a:t>
             </a:r>
             <a:endParaRPr lang="en-US" sz="1100" dirty="0"/>
           </a:p>
@@ -7596,7 +7596,7 @@
                 <a:ea typeface="Calibri" pitchFamily="34" charset="-122"/>
                 <a:cs typeface="Calibri" pitchFamily="34" charset="-120"/>
               </a:rPr>
-              <a:t>35 AUTOMATED TESTS, ALL PASSING</a:t>
+              <a:t>36 AUTOMATED TESTS, ALL PASSING</a:t>
             </a:r>
             <a:endParaRPr lang="en-US" sz="1100" dirty="0"/>
           </a:p>
@@ -10135,6 +10135,280 @@
                   </a:tcPr>
                 </a:tc>
               </a:tr>
+              <a:tr h="384048">
+                <a:tc>
+                  <a:txBody>
+                    <a:bodyPr/>
+                    <a:lstStyle/>
+                    <a:p>
+                      <a:pPr indent="0" marL="0">
+                        <a:buNone/>
+                      </a:pPr>
+                      <a:r>
+                        <a:rPr lang="en-US" sz="1100" dirty="0">
+                          <a:solidFill>
+                            <a:srgbClr val="2B3440"/>
+                          </a:solidFill>
+                          <a:latin typeface="Calibri" pitchFamily="34" charset="0"/>
+                          <a:ea typeface="Calibri" pitchFamily="34" charset="-122"/>
+                          <a:cs typeface="Calibri" pitchFamily="34" charset="-120"/>
+                        </a:rPr>
+                        <a:t>Document is not a PDF</a:t>
+                      </a:r>
+                      <a:endParaRPr lang="en-US" sz="1100" dirty="0">
+                        <a:latin typeface="Calibri" charset="0"/>
+                        <a:ea typeface="Calibri" charset="0"/>
+                        <a:cs typeface="Calibri" charset="0"/>
+                      </a:endParaRPr>
+                    </a:p>
+                  </a:txBody>
+                  <a:tcPr marL="91440" marR="91440" marT="45720" marB="45720" anchor="ctr">
+                    <a:lnL w="12700" cap="flat" cmpd="sng" algn="ctr">
+                      <a:solidFill>
+                        <a:srgbClr val="DCE4EF"/>
+                      </a:solidFill>
+                      <a:prstDash val="solid"/>
+                      <a:round/>
+                      <a:headEnd type="none" w="med" len="med"/>
+                      <a:tailEnd type="none" w="med" len="med"/>
+                    </a:lnL>
+                    <a:lnR w="12700" cap="flat" cmpd="sng" algn="ctr">
+                      <a:solidFill>
+                        <a:srgbClr val="DCE4EF"/>
+                      </a:solidFill>
+                      <a:prstDash val="solid"/>
+                      <a:round/>
+                      <a:headEnd type="none" w="med" len="med"/>
+                      <a:tailEnd type="none" w="med" len="med"/>
+                    </a:lnR>
+                    <a:lnT w="12700" cap="flat" cmpd="sng" algn="ctr">
+                      <a:solidFill>
+                        <a:srgbClr val="DCE4EF"/>
+                      </a:solidFill>
+                      <a:prstDash val="solid"/>
+                      <a:round/>
+                      <a:headEnd type="none" w="med" len="med"/>
+                      <a:tailEnd type="none" w="med" len="med"/>
+                    </a:lnT>
+                    <a:lnB w="12700" cap="flat" cmpd="sng" algn="ctr">
+                      <a:solidFill>
+                        <a:srgbClr val="DCE4EF"/>
+                      </a:solidFill>
+                      <a:prstDash val="solid"/>
+                      <a:round/>
+                      <a:headEnd type="none" w="med" len="med"/>
+                      <a:tailEnd type="none" w="med" len="med"/>
+                    </a:lnB>
+                    <a:solidFill>
+                      <a:srgbClr val="FFFFFF"/>
+                    </a:solidFill>
+                  </a:tcPr>
+                </a:tc>
+                <a:tc>
+                  <a:txBody>
+                    <a:bodyPr/>
+                    <a:lstStyle/>
+                    <a:p>
+                      <a:pPr indent="0" marL="0">
+                        <a:buNone/>
+                      </a:pPr>
+                      <a:r>
+                        <a:rPr lang="en-US" sz="1100" dirty="0">
+                          <a:solidFill>
+                            <a:srgbClr val="6B7686"/>
+                          </a:solidFill>
+                          <a:latin typeface="Calibri" pitchFamily="34" charset="0"/>
+                          <a:ea typeface="Calibri" pitchFamily="34" charset="-122"/>
+                          <a:cs typeface="Calibri" pitchFamily="34" charset="-120"/>
+                        </a:rPr>
+                        <a:t>Registration refused, one PDF asked for</a:t>
+                      </a:r>
+                      <a:endParaRPr lang="en-US" sz="1100" dirty="0">
+                        <a:latin typeface="Calibri" charset="0"/>
+                        <a:ea typeface="Calibri" charset="0"/>
+                        <a:cs typeface="Calibri" charset="0"/>
+                      </a:endParaRPr>
+                    </a:p>
+                  </a:txBody>
+                  <a:tcPr marL="91440" marR="91440" marT="45720" marB="45720" anchor="ctr">
+                    <a:lnL w="12700" cap="flat" cmpd="sng" algn="ctr">
+                      <a:solidFill>
+                        <a:srgbClr val="DCE4EF"/>
+                      </a:solidFill>
+                      <a:prstDash val="solid"/>
+                      <a:round/>
+                      <a:headEnd type="none" w="med" len="med"/>
+                      <a:tailEnd type="none" w="med" len="med"/>
+                    </a:lnL>
+                    <a:lnR w="12700" cap="flat" cmpd="sng" algn="ctr">
+                      <a:solidFill>
+                        <a:srgbClr val="DCE4EF"/>
+                      </a:solidFill>
+                      <a:prstDash val="solid"/>
+                      <a:round/>
+                      <a:headEnd type="none" w="med" len="med"/>
+                      <a:tailEnd type="none" w="med" len="med"/>
+                    </a:lnR>
+                    <a:lnT w="12700" cap="flat" cmpd="sng" algn="ctr">
+                      <a:solidFill>
+                        <a:srgbClr val="DCE4EF"/>
+                      </a:solidFill>
+                      <a:prstDash val="solid"/>
+                      <a:round/>
+                      <a:headEnd type="none" w="med" len="med"/>
+                      <a:tailEnd type="none" w="med" len="med"/>
+                    </a:lnT>
+                    <a:lnB w="12700" cap="flat" cmpd="sng" algn="ctr">
+                      <a:solidFill>
+                        <a:srgbClr val="DCE4EF"/>
+                      </a:solidFill>
+                      <a:prstDash val="solid"/>
+                      <a:round/>
+                      <a:headEnd type="none" w="med" len="med"/>
+                      <a:tailEnd type="none" w="med" len="med"/>
+                    </a:lnB>
+                    <a:solidFill>
+                      <a:srgbClr val="FFFFFF"/>
+                    </a:solidFill>
+                  </a:tcPr>
+                </a:tc>
+                <a:tc>
+                  <a:txBody>
+                    <a:bodyPr/>
+                    <a:lstStyle/>
+                    <a:p>
+                      <a:pPr indent="0" marL="0">
+                        <a:buNone/>
+                      </a:pPr>
+                      <a:r>
+                        <a:rPr lang="en-US" sz="1100" dirty="0">
+                          <a:solidFill>
+                            <a:srgbClr val="6B7686"/>
+                          </a:solidFill>
+                          <a:latin typeface="Calibri" pitchFamily="34" charset="0"/>
+                          <a:ea typeface="Calibri" pitchFamily="34" charset="-122"/>
+                          <a:cs typeface="Calibri" pitchFamily="34" charset="-120"/>
+                        </a:rPr>
+                        <a:t>Refused</a:t>
+                      </a:r>
+                      <a:endParaRPr lang="en-US" sz="1100" dirty="0">
+                        <a:latin typeface="Calibri" charset="0"/>
+                        <a:ea typeface="Calibri" charset="0"/>
+                        <a:cs typeface="Calibri" charset="0"/>
+                      </a:endParaRPr>
+                    </a:p>
+                  </a:txBody>
+                  <a:tcPr marL="91440" marR="91440" marT="45720" marB="45720" anchor="ctr">
+                    <a:lnL w="12700" cap="flat" cmpd="sng" algn="ctr">
+                      <a:solidFill>
+                        <a:srgbClr val="DCE4EF"/>
+                      </a:solidFill>
+                      <a:prstDash val="solid"/>
+                      <a:round/>
+                      <a:headEnd type="none" w="med" len="med"/>
+                      <a:tailEnd type="none" w="med" len="med"/>
+                    </a:lnL>
+                    <a:lnR w="12700" cap="flat" cmpd="sng" algn="ctr">
+                      <a:solidFill>
+                        <a:srgbClr val="DCE4EF"/>
+                      </a:solidFill>
+                      <a:prstDash val="solid"/>
+                      <a:round/>
+                      <a:headEnd type="none" w="med" len="med"/>
+                      <a:tailEnd type="none" w="med" len="med"/>
+                    </a:lnR>
+                    <a:lnT w="12700" cap="flat" cmpd="sng" algn="ctr">
+                      <a:solidFill>
+                        <a:srgbClr val="DCE4EF"/>
+                      </a:solidFill>
+                      <a:prstDash val="solid"/>
+                      <a:round/>
+                      <a:headEnd type="none" w="med" len="med"/>
+                      <a:tailEnd type="none" w="med" len="med"/>
+                    </a:lnT>
+                    <a:lnB w="12700" cap="flat" cmpd="sng" algn="ctr">
+                      <a:solidFill>
+                        <a:srgbClr val="DCE4EF"/>
+                      </a:solidFill>
+                      <a:prstDash val="solid"/>
+                      <a:round/>
+                      <a:headEnd type="none" w="med" len="med"/>
+                      <a:tailEnd type="none" w="med" len="med"/>
+                    </a:lnB>
+                    <a:solidFill>
+                      <a:srgbClr val="FFFFFF"/>
+                    </a:solidFill>
+                  </a:tcPr>
+                </a:tc>
+                <a:tc>
+                  <a:txBody>
+                    <a:bodyPr/>
+                    <a:lstStyle/>
+                    <a:p>
+                      <a:pPr algn="ctr" indent="0" marL="0">
+                        <a:buNone/>
+                      </a:pPr>
+                      <a:r>
+                        <a:rPr lang="en-US" sz="1050" b="1" dirty="0">
+                          <a:solidFill>
+                            <a:srgbClr val="1E7A46"/>
+                          </a:solidFill>
+                          <a:latin typeface="Calibri" pitchFamily="34" charset="0"/>
+                          <a:ea typeface="Calibri" pitchFamily="34" charset="-122"/>
+                          <a:cs typeface="Calibri" pitchFamily="34" charset="-120"/>
+                        </a:rPr>
+                        <a:t>PASS</a:t>
+                      </a:r>
+                      <a:endParaRPr lang="en-US" sz="1050" dirty="0">
+                        <a:latin typeface="Calibri" charset="0"/>
+                        <a:ea typeface="Calibri" charset="0"/>
+                        <a:cs typeface="Calibri" charset="0"/>
+                      </a:endParaRPr>
+                    </a:p>
+                  </a:txBody>
+                  <a:tcPr marL="91440" marR="91440" marT="45720" marB="45720" anchor="ctr">
+                    <a:lnL w="12700" cap="flat" cmpd="sng" algn="ctr">
+                      <a:solidFill>
+                        <a:srgbClr val="DCE4EF"/>
+                      </a:solidFill>
+                      <a:prstDash val="solid"/>
+                      <a:round/>
+                      <a:headEnd type="none" w="med" len="med"/>
+                      <a:tailEnd type="none" w="med" len="med"/>
+                    </a:lnL>
+                    <a:lnR w="12700" cap="flat" cmpd="sng" algn="ctr">
+                      <a:solidFill>
+                        <a:srgbClr val="DCE4EF"/>
+                      </a:solidFill>
+                      <a:prstDash val="solid"/>
+                      <a:round/>
+                      <a:headEnd type="none" w="med" len="med"/>
+                      <a:tailEnd type="none" w="med" len="med"/>
+                    </a:lnR>
+                    <a:lnT w="12700" cap="flat" cmpd="sng" algn="ctr">
+                      <a:solidFill>
+                        <a:srgbClr val="DCE4EF"/>
+                      </a:solidFill>
+                      <a:prstDash val="solid"/>
+                      <a:round/>
+                      <a:headEnd type="none" w="med" len="med"/>
+                      <a:tailEnd type="none" w="med" len="med"/>
+                    </a:lnT>
+                    <a:lnB w="12700" cap="flat" cmpd="sng" algn="ctr">
+                      <a:solidFill>
+                        <a:srgbClr val="DCE4EF"/>
+                      </a:solidFill>
+                      <a:prstDash val="solid"/>
+                      <a:round/>
+                      <a:headEnd type="none" w="med" len="med"/>
+                      <a:tailEnd type="none" w="med" len="med"/>
+                    </a:lnB>
+                    <a:solidFill>
+                      <a:srgbClr val="FFFFFF"/>
+                    </a:solidFill>
+                  </a:tcPr>
+                </a:tc>
+              </a:tr>
             </a:tbl>
           </a:graphicData>
         </a:graphic>
@@ -10199,7 +10473,7 @@
                 <a:ea typeface="Cambria" pitchFamily="34" charset="-122"/>
                 <a:cs typeface="Cambria" pitchFamily="34" charset="-120"/>
               </a:rPr>
-              <a:t>35</a:t>
+              <a:t>36</a:t>
             </a:r>
             <a:endParaRPr lang="en-US" sz="5400" dirty="0"/>
           </a:p>
@@ -11164,7 +11438,7 @@
                 <a:ea typeface="Cambria" pitchFamily="34" charset="-122"/>
                 <a:cs typeface="Cambria" pitchFamily="34" charset="-120"/>
               </a:rPr>
-              <a:t>35</a:t>
+              <a:t>36</a:t>
             </a:r>
             <a:endParaRPr lang="en-US" sz="3600" dirty="0"/>
           </a:p>
@@ -13197,7 +13471,7 @@
                 <a:ea typeface="Cambria" pitchFamily="34" charset="-122"/>
                 <a:cs typeface="Cambria" pitchFamily="34" charset="-120"/>
               </a:rPr>
-              <a:t>Limited file handling</a:t>
+              <a:t>One combined file</a:t>
             </a:r>
             <a:endParaRPr lang="en-US" sz="1350" dirty="0"/>
           </a:p>
@@ -13239,7 +13513,7 @@
                 <a:ea typeface="Calibri" pitchFamily="34" charset="-122"/>
                 <a:cs typeface="Calibri" pitchFamily="34" charset="-120"/>
               </a:rPr>
-              <a:t>Only the identity document at registration; no resume upload or log attachments</a:t>
+              <a:t>NID, resume and certificates arrive as a single PDF; the system cannot index them separately</a:t>
             </a:r>
             <a:endParaRPr lang="en-US" sz="1050" dirty="0"/>
           </a:p>
@@ -14550,7 +14824,7 @@
                 <a:ea typeface="Cambria" pitchFamily="34" charset="-122"/>
                 <a:cs typeface="Cambria" pitchFamily="34" charset="-120"/>
               </a:rPr>
-              <a:t>Resume and attachments</a:t>
+              <a:t>Separate document fields</a:t>
             </a:r>
             <a:endParaRPr lang="en-US" sz="1400" dirty="0"/>
           </a:p>
@@ -14592,7 +14866,7 @@
                 <a:ea typeface="Calibri" pitchFamily="34" charset="-122"/>
                 <a:cs typeface="Calibri" pitchFamily="34" charset="-120"/>
               </a:rPr>
-              <a:t>Upload a resume and attach files to weekly logs</a:t>
+              <a:t>A parsed resume field and file attachments on the weekly logs</a:t>
             </a:r>
             <a:endParaRPr lang="en-US" sz="1100" dirty="0"/>
           </a:p>
@@ -22690,7 +22964,7 @@
                 <a:ea typeface="Calibri" pitchFamily="34" charset="-122"/>
                 <a:cs typeface="Calibri" pitchFamily="34" charset="-120"/>
               </a:rPr>
-              <a:t>pytest — 35 tests</a:t>
+              <a:t>pytest — 36 tests</a:t>
             </a:r>
             <a:endParaRPr lang="en-US" sz="1150" dirty="0"/>
           </a:p>

--- a/docs/Final_Defense_Presentation.pptx
+++ b/docs/Final_Defense_Presentation.pptx
@@ -2193,7 +2193,7 @@
           <a:p>
             <a:r>
               <a:rPr lang="en-US" dirty="0"/>
-              <a:t>If asked to name the tables: roles, users, colleges, students, companies, supervisors, internships, applications, progress_logs, notifications, audit_logs.</a:t>
+              <a:t>If asked to name the tables: roles, users, students, companies, supervisors, internships, applications, progress_logs.</a:t>
             </a:r>
             <a:endParaRPr lang="en-US" dirty="0"/>
           </a:p>
@@ -3587,7 +3587,7 @@
                 <a:ea typeface="Courier New" pitchFamily="34" charset="-122"/>
                 <a:cs typeface="Courier New" pitchFamily="34" charset="-120"/>
               </a:rPr>
-              <a:t>├── templates/        21 HTML pages</a:t>
+              <a:t>├── templates/        18 HTML pages</a:t>
             </a:r>
             <a:endParaRPr lang="en-US" sz="1100" dirty="0"/>
           </a:p>
@@ -3627,7 +3627,7 @@
                 <a:ea typeface="Courier New" pitchFamily="34" charset="-122"/>
                 <a:cs typeface="Courier New" pitchFamily="34" charset="-120"/>
               </a:rPr>
-              <a:t>└── tests/            36 tests</a:t>
+              <a:t>└── tests/            29 tests</a:t>
             </a:r>
             <a:endParaRPr lang="en-US" sz="1100" dirty="0"/>
           </a:p>
@@ -5138,7 +5138,7 @@
                 <a:ea typeface="Calibri" pitchFamily="34" charset="-122"/>
                 <a:cs typeface="Calibri" pitchFamily="34" charset="-120"/>
               </a:rPr>
-              <a:t>Landing page shows live counts, partner companies and colleges</a:t>
+              <a:t>Landing page shows live counts and the partner companies</a:t>
             </a:r>
             <a:endParaRPr lang="en-US" sz="1100" dirty="0"/>
           </a:p>
@@ -5285,7 +5285,7 @@
                 <a:ea typeface="Calibri" pitchFamily="34" charset="-122"/>
                 <a:cs typeface="Calibri" pitchFamily="34" charset="-120"/>
               </a:rPr>
-              <a:t>College is selected and one PDF with NID, resume and documents is uploaded</a:t>
+              <a:t>One PDF with the NID, resume and other documents is uploaded</a:t>
             </a:r>
             <a:endParaRPr lang="en-US" sz="1100" dirty="0"/>
           </a:p>
@@ -5873,7 +5873,7 @@
                 <a:ea typeface="Calibri" pitchFamily="34" charset="-122"/>
                 <a:cs typeface="Calibri" pitchFamily="34" charset="-120"/>
               </a:rPr>
-              <a:t>The student is notified of the decision</a:t>
+              <a:t>The status changes to selected on the student’s page</a:t>
             </a:r>
             <a:endParaRPr lang="en-US" sz="1100" dirty="0"/>
           </a:p>
@@ -6167,7 +6167,7 @@
                 <a:ea typeface="Calibri" pitchFamily="34" charset="-122"/>
                 <a:cs typeface="Calibri" pitchFamily="34" charset="-120"/>
               </a:rPr>
-              <a:t>Feedback and marks, visible to the student immediately</a:t>
+              <a:t>Feedback and marks, visible on the student’s log book</a:t>
             </a:r>
             <a:endParaRPr lang="en-US" sz="1100" dirty="0"/>
           </a:p>
@@ -7596,7 +7596,7 @@
                 <a:ea typeface="Calibri" pitchFamily="34" charset="-122"/>
                 <a:cs typeface="Calibri" pitchFamily="34" charset="-120"/>
               </a:rPr>
-              <a:t>36 AUTOMATED TESTS, ALL PASSING</a:t>
+              <a:t>29 AUTOMATED TESTS, ALL PASSING</a:t>
             </a:r>
             <a:endParaRPr lang="en-US" sz="1100" dirty="0"/>
           </a:p>
@@ -10473,7 +10473,7 @@
                 <a:ea typeface="Cambria" pitchFamily="34" charset="-122"/>
                 <a:cs typeface="Cambria" pitchFamily="34" charset="-120"/>
               </a:rPr>
-              <a:t>36</a:t>
+              <a:t>29</a:t>
             </a:r>
             <a:endParaRPr lang="en-US" sz="5400" dirty="0"/>
           </a:p>
@@ -11123,7 +11123,7 @@
                 <a:ea typeface="Cambria" pitchFamily="34" charset="-122"/>
                 <a:cs typeface="Cambria" pitchFamily="34" charset="-120"/>
               </a:rPr>
-              <a:t>11</a:t>
+              <a:t>8</a:t>
             </a:r>
             <a:endParaRPr lang="en-US" sz="3600" dirty="0"/>
           </a:p>
@@ -11333,7 +11333,7 @@
                 <a:ea typeface="Cambria" pitchFamily="34" charset="-122"/>
                 <a:cs typeface="Cambria" pitchFamily="34" charset="-120"/>
               </a:rPr>
-              <a:t>32</a:t>
+              <a:t>29</a:t>
             </a:r>
             <a:endParaRPr lang="en-US" sz="3600" dirty="0"/>
           </a:p>
@@ -11438,7 +11438,7 @@
                 <a:ea typeface="Cambria" pitchFamily="34" charset="-122"/>
                 <a:cs typeface="Cambria" pitchFamily="34" charset="-120"/>
               </a:rPr>
-              <a:t>36</a:t>
+              <a:t>29</a:t>
             </a:r>
             <a:endParaRPr lang="en-US" sz="3600" dirty="0"/>
           </a:p>
@@ -14510,7 +14510,7 @@
                 <a:ea typeface="Cambria" pitchFamily="34" charset="-122"/>
                 <a:cs typeface="Cambria" pitchFamily="34" charset="-120"/>
               </a:rPr>
-              <a:t>Email delivery</a:t>
+              <a:t>Notifications by email</a:t>
             </a:r>
             <a:endParaRPr lang="en-US" sz="1400" dirty="0"/>
           </a:p>
@@ -14552,7 +14552,7 @@
                 <a:ea typeface="Calibri" pitchFamily="34" charset="-122"/>
                 <a:cs typeface="Calibri" pitchFamily="34" charset="-120"/>
               </a:rPr>
-              <a:t>Send the notifications the system already generates by email</a:t>
+              <a:t>Raise a message on each decision and deliver it by email</a:t>
             </a:r>
             <a:endParaRPr lang="en-US" sz="1100" dirty="0"/>
           </a:p>
@@ -20123,7 +20123,7 @@
                 <a:ea typeface="Calibri" pitchFamily="34" charset="-122"/>
                 <a:cs typeface="Calibri" pitchFamily="34" charset="-120"/>
               </a:rPr>
-              <a:t>Eleven related</a:t>
+              <a:t>Eight related</a:t>
             </a:r>
             <a:endParaRPr lang="en-US" sz="1100" dirty="0"/>
           </a:p>
@@ -21395,7 +21395,7 @@
                 <a:ea typeface="Cambria" pitchFamily="34" charset="-122"/>
                 <a:cs typeface="Cambria" pitchFamily="34" charset="-120"/>
               </a:rPr>
-              <a:t>Notifications</a:t>
+              <a:t>Exports and management</a:t>
             </a:r>
             <a:endParaRPr lang="en-US" sz="1350" dirty="0"/>
           </a:p>
@@ -21437,7 +21437,7 @@
                 <a:ea typeface="Calibri" pitchFamily="34" charset="-122"/>
                 <a:cs typeface="Calibri" pitchFamily="34" charset="-120"/>
               </a:rPr>
-              <a:t>Bell with unread count for applications, decisions, logs and feedback</a:t>
+              <a:t>CSV export of applicants and of the searchable user list</a:t>
             </a:r>
             <a:endParaRPr lang="en-US" sz="1080" dirty="0"/>
           </a:p>
@@ -21445,148 +21445,30 @@
       </p:sp>
       <p:sp>
         <p:nvSpPr>
-          <p:cNvPr id="34" name="Shape 26"/>
-          <p:cNvSpPr/>
-          <p:nvPr/>
-        </p:nvSpPr>
-        <p:spPr>
-          <a:xfrm>
-            <a:off x="548640" y="5102352"/>
-            <a:ext cx="5486400" cy="1024128"/>
-          </a:xfrm>
-          <a:prstGeom prst="roundRect">
-            <a:avLst>
-              <a:gd name="adj" fmla="val 8036"/>
-            </a:avLst>
-          </a:prstGeom>
-          <a:solidFill>
-            <a:srgbClr val="F4F7FB"/>
-          </a:solidFill>
-          <a:ln w="12700">
-            <a:solidFill>
-              <a:srgbClr val="DCE4EF"/>
-            </a:solidFill>
-            <a:prstDash val="solid"/>
-          </a:ln>
-        </p:spPr>
-      </p:sp>
-      <p:sp>
-        <p:nvSpPr>
-          <p:cNvPr id="35" name="Shape 27"/>
-          <p:cNvSpPr/>
-          <p:nvPr/>
-        </p:nvSpPr>
-        <p:spPr>
-          <a:xfrm>
-            <a:off x="804672" y="5404104"/>
-            <a:ext cx="420624" cy="420624"/>
-          </a:xfrm>
-          <a:prstGeom prst="ellipse">
-            <a:avLst/>
-          </a:prstGeom>
-          <a:solidFill>
-            <a:srgbClr val="12294D"/>
-          </a:solidFill>
-          <a:ln w="12700">
-            <a:solidFill>
-              <a:srgbClr val="12294D"/>
-            </a:solidFill>
-            <a:prstDash val="solid"/>
-          </a:ln>
-        </p:spPr>
-      </p:sp>
-      <p:pic>
-        <p:nvPicPr>
-          <p:cNvPr id="36" name="Image 6" descr="preencoded.png">    </p:cNvPr>
-          <p:cNvPicPr>
-            <a:picLocks noChangeAspect="1"/>
-          </p:cNvPicPr>
-          <p:nvPr/>
-        </p:nvPicPr>
-        <p:blipFill>
-          <a:blip r:embed="rId7"/>
-          <a:stretch>
-            <a:fillRect/>
-          </a:stretch>
-        </p:blipFill>
-        <p:spPr>
-          <a:xfrm>
-            <a:off x="905622" y="5505054"/>
-            <a:ext cx="218724" cy="218724"/>
-          </a:xfrm>
-          <a:prstGeom prst="rect">
-            <a:avLst/>
-          </a:prstGeom>
-        </p:spPr>
-      </p:pic>
-      <p:sp>
-        <p:nvSpPr>
-          <p:cNvPr id="37" name="Text 28"/>
-          <p:cNvSpPr/>
-          <p:nvPr/>
-        </p:nvSpPr>
-        <p:spPr>
-          <a:xfrm>
-            <a:off x="1389888" y="5285232"/>
-            <a:ext cx="4480560" cy="274320"/>
-          </a:xfrm>
-          <a:prstGeom prst="rect">
-            <a:avLst/>
-          </a:prstGeom>
-          <a:noFill/>
-          <a:ln/>
-        </p:spPr>
-        <p:txBody>
-          <a:bodyPr wrap="square" lIns="0" tIns="0" rIns="0" bIns="0" rtlCol="0" anchor="ctr"/>
-          <a:lstStyle/>
-          <a:p>
-            <a:pPr indent="0" marL="0">
-              <a:buNone/>
-            </a:pPr>
-            <a:r>
-              <a:rPr lang="en-US" sz="1350" b="1" dirty="0">
-                <a:solidFill>
-                  <a:srgbClr val="12294D"/>
-                </a:solidFill>
-                <a:latin typeface="Cambria" pitchFamily="34" charset="0"/>
-                <a:ea typeface="Cambria" pitchFamily="34" charset="-122"/>
-                <a:cs typeface="Cambria" pitchFamily="34" charset="-120"/>
-              </a:rPr>
-              <a:t>Audit log</a:t>
-            </a:r>
-            <a:endParaRPr lang="en-US" sz="1350" dirty="0"/>
-          </a:p>
-        </p:txBody>
-      </p:sp>
-      <p:sp>
-        <p:nvSpPr>
-          <p:cNvPr id="38" name="Text 29"/>
-          <p:cNvSpPr/>
-          <p:nvPr/>
-        </p:nvSpPr>
-        <p:spPr>
-          <a:xfrm>
-            <a:off x="1389888" y="5577840"/>
-            <a:ext cx="4480560" cy="457200"/>
-          </a:xfrm>
-          <a:prstGeom prst="rect">
-            <a:avLst/>
-          </a:prstGeom>
-          <a:noFill/>
-          <a:ln/>
-        </p:spPr>
-        <p:txBody>
-          <a:bodyPr wrap="square" lIns="0" tIns="0" rIns="0" bIns="0" rtlCol="0" anchor="ctr"/>
-          <a:lstStyle/>
-          <a:p>
-            <a:pPr indent="0" marL="0">
-              <a:lnSpc>
-                <a:spcPts val="1400"/>
-              </a:lnSpc>
-              <a:buNone/>
-            </a:pPr>
-            <a:r>
-              <a:rPr lang="en-US" sz="1080" dirty="0">
+          <p:cNvPr id="34" name="Text 26"/>
+          <p:cNvSpPr/>
+          <p:nvPr/>
+        </p:nvSpPr>
+        <p:spPr>
+          <a:xfrm>
+            <a:off x="548640" y="6355080"/>
+            <a:ext cx="6400800" cy="274320"/>
+          </a:xfrm>
+          <a:prstGeom prst="rect">
+            <a:avLst/>
+          </a:prstGeom>
+          <a:noFill/>
+          <a:ln/>
+        </p:spPr>
+        <p:txBody>
+          <a:bodyPr wrap="square" lIns="0" tIns="0" rIns="0" bIns="0" rtlCol="0" anchor="ctr"/>
+          <a:lstStyle/>
+          <a:p>
+            <a:pPr indent="0" marL="0">
+              <a:buNone/>
+            </a:pPr>
+            <a:r>
+              <a:rPr lang="en-US" sz="900" dirty="0">
                 <a:solidFill>
                   <a:srgbClr val="6B7686"/>
                 </a:solidFill>
@@ -21594,202 +21476,6 @@
                 <a:ea typeface="Calibri" pitchFamily="34" charset="-122"/>
                 <a:cs typeface="Calibri" pitchFamily="34" charset="-120"/>
               </a:rPr>
-              <a:t>Every important action recorded with user and time, including failed logins</a:t>
-            </a:r>
-            <a:endParaRPr lang="en-US" sz="1080" dirty="0"/>
-          </a:p>
-        </p:txBody>
-      </p:sp>
-      <p:sp>
-        <p:nvSpPr>
-          <p:cNvPr id="39" name="Shape 30"/>
-          <p:cNvSpPr/>
-          <p:nvPr/>
-        </p:nvSpPr>
-        <p:spPr>
-          <a:xfrm>
-            <a:off x="6355080" y="5102352"/>
-            <a:ext cx="5486400" cy="1024128"/>
-          </a:xfrm>
-          <a:prstGeom prst="roundRect">
-            <a:avLst>
-              <a:gd name="adj" fmla="val 8036"/>
-            </a:avLst>
-          </a:prstGeom>
-          <a:solidFill>
-            <a:srgbClr val="F4F7FB"/>
-          </a:solidFill>
-          <a:ln w="12700">
-            <a:solidFill>
-              <a:srgbClr val="DCE4EF"/>
-            </a:solidFill>
-            <a:prstDash val="solid"/>
-          </a:ln>
-        </p:spPr>
-      </p:sp>
-      <p:sp>
-        <p:nvSpPr>
-          <p:cNvPr id="40" name="Shape 31"/>
-          <p:cNvSpPr/>
-          <p:nvPr/>
-        </p:nvSpPr>
-        <p:spPr>
-          <a:xfrm>
-            <a:off x="6611112" y="5404104"/>
-            <a:ext cx="420624" cy="420624"/>
-          </a:xfrm>
-          <a:prstGeom prst="ellipse">
-            <a:avLst/>
-          </a:prstGeom>
-          <a:solidFill>
-            <a:srgbClr val="12294D"/>
-          </a:solidFill>
-          <a:ln w="12700">
-            <a:solidFill>
-              <a:srgbClr val="12294D"/>
-            </a:solidFill>
-            <a:prstDash val="solid"/>
-          </a:ln>
-        </p:spPr>
-      </p:sp>
-      <p:pic>
-        <p:nvPicPr>
-          <p:cNvPr id="41" name="Image 7" descr="preencoded.png">    </p:cNvPr>
-          <p:cNvPicPr>
-            <a:picLocks noChangeAspect="1"/>
-          </p:cNvPicPr>
-          <p:nvPr/>
-        </p:nvPicPr>
-        <p:blipFill>
-          <a:blip r:embed="rId8"/>
-          <a:stretch>
-            <a:fillRect/>
-          </a:stretch>
-        </p:blipFill>
-        <p:spPr>
-          <a:xfrm>
-            <a:off x="6712062" y="5505054"/>
-            <a:ext cx="218724" cy="218724"/>
-          </a:xfrm>
-          <a:prstGeom prst="rect">
-            <a:avLst/>
-          </a:prstGeom>
-        </p:spPr>
-      </p:pic>
-      <p:sp>
-        <p:nvSpPr>
-          <p:cNvPr id="42" name="Text 32"/>
-          <p:cNvSpPr/>
-          <p:nvPr/>
-        </p:nvSpPr>
-        <p:spPr>
-          <a:xfrm>
-            <a:off x="7196328" y="5285232"/>
-            <a:ext cx="4480560" cy="274320"/>
-          </a:xfrm>
-          <a:prstGeom prst="rect">
-            <a:avLst/>
-          </a:prstGeom>
-          <a:noFill/>
-          <a:ln/>
-        </p:spPr>
-        <p:txBody>
-          <a:bodyPr wrap="square" lIns="0" tIns="0" rIns="0" bIns="0" rtlCol="0" anchor="ctr"/>
-          <a:lstStyle/>
-          <a:p>
-            <a:pPr indent="0" marL="0">
-              <a:buNone/>
-            </a:pPr>
-            <a:r>
-              <a:rPr lang="en-US" sz="1350" b="1" dirty="0">
-                <a:solidFill>
-                  <a:srgbClr val="12294D"/>
-                </a:solidFill>
-                <a:latin typeface="Cambria" pitchFamily="34" charset="0"/>
-                <a:ea typeface="Cambria" pitchFamily="34" charset="-122"/>
-                <a:cs typeface="Cambria" pitchFamily="34" charset="-120"/>
-              </a:rPr>
-              <a:t>Exports and management</a:t>
-            </a:r>
-            <a:endParaRPr lang="en-US" sz="1350" dirty="0"/>
-          </a:p>
-        </p:txBody>
-      </p:sp>
-      <p:sp>
-        <p:nvSpPr>
-          <p:cNvPr id="43" name="Text 33"/>
-          <p:cNvSpPr/>
-          <p:nvPr/>
-        </p:nvSpPr>
-        <p:spPr>
-          <a:xfrm>
-            <a:off x="7196328" y="5577840"/>
-            <a:ext cx="4480560" cy="457200"/>
-          </a:xfrm>
-          <a:prstGeom prst="rect">
-            <a:avLst/>
-          </a:prstGeom>
-          <a:noFill/>
-          <a:ln/>
-        </p:spPr>
-        <p:txBody>
-          <a:bodyPr wrap="square" lIns="0" tIns="0" rIns="0" bIns="0" rtlCol="0" anchor="ctr"/>
-          <a:lstStyle/>
-          <a:p>
-            <a:pPr indent="0" marL="0">
-              <a:lnSpc>
-                <a:spcPts val="1400"/>
-              </a:lnSpc>
-              <a:buNone/>
-            </a:pPr>
-            <a:r>
-              <a:rPr lang="en-US" sz="1080" dirty="0">
-                <a:solidFill>
-                  <a:srgbClr val="6B7686"/>
-                </a:solidFill>
-                <a:latin typeface="Calibri" pitchFamily="34" charset="0"/>
-                <a:ea typeface="Calibri" pitchFamily="34" charset="-122"/>
-                <a:cs typeface="Calibri" pitchFamily="34" charset="-120"/>
-              </a:rPr>
-              <a:t>CSV export, searchable user list, college and user administration</a:t>
-            </a:r>
-            <a:endParaRPr lang="en-US" sz="1080" dirty="0"/>
-          </a:p>
-        </p:txBody>
-      </p:sp>
-      <p:sp>
-        <p:nvSpPr>
-          <p:cNvPr id="44" name="Text 34"/>
-          <p:cNvSpPr/>
-          <p:nvPr/>
-        </p:nvSpPr>
-        <p:spPr>
-          <a:xfrm>
-            <a:off x="548640" y="6355080"/>
-            <a:ext cx="6400800" cy="274320"/>
-          </a:xfrm>
-          <a:prstGeom prst="rect">
-            <a:avLst/>
-          </a:prstGeom>
-          <a:noFill/>
-          <a:ln/>
-        </p:spPr>
-        <p:txBody>
-          <a:bodyPr wrap="square" lIns="0" tIns="0" rIns="0" bIns="0" rtlCol="0" anchor="ctr"/>
-          <a:lstStyle/>
-          <a:p>
-            <a:pPr indent="0" marL="0">
-              <a:buNone/>
-            </a:pPr>
-            <a:r>
-              <a:rPr lang="en-US" sz="900" dirty="0">
-                <a:solidFill>
-                  <a:srgbClr val="6B7686"/>
-                </a:solidFill>
-                <a:latin typeface="Calibri" pitchFamily="34" charset="0"/>
-                <a:ea typeface="Calibri" pitchFamily="34" charset="-122"/>
-                <a:cs typeface="Calibri" pitchFamily="34" charset="-120"/>
-              </a:rPr>
               <a:t>Internship Portal  ·  Final Project Defense</a:t>
             </a:r>
             <a:endParaRPr lang="en-US" sz="900" dirty="0"/>
@@ -21798,7 +21484,7 @@
       </p:sp>
       <p:sp>
         <p:nvSpPr>
-          <p:cNvPr id="45" name="Text 35"/>
+          <p:cNvPr id="35" name="Text 27"/>
           <p:cNvSpPr/>
           <p:nvPr/>
         </p:nvSpPr>
@@ -22709,7 +22395,7 @@
                 <a:ea typeface="Calibri" pitchFamily="34" charset="-122"/>
                 <a:cs typeface="Calibri" pitchFamily="34" charset="-120"/>
               </a:rPr>
-              <a:t>MySQL — eleven related tables</a:t>
+              <a:t>MySQL — eight related tables</a:t>
             </a:r>
             <a:endParaRPr lang="en-US" sz="1150" dirty="0"/>
           </a:p>
@@ -22964,7 +22650,7 @@
                 <a:ea typeface="Calibri" pitchFamily="34" charset="-122"/>
                 <a:cs typeface="Calibri" pitchFamily="34" charset="-120"/>
               </a:rPr>
-              <a:t>pytest — 36 tests</a:t>
+              <a:t>pytest — 29 tests</a:t>
             </a:r>
             <a:endParaRPr lang="en-US" sz="1150" dirty="0"/>
           </a:p>
@@ -24050,7 +23736,7 @@
                 <a:ea typeface="Calibri" pitchFamily="34" charset="-122"/>
                 <a:cs typeface="Calibri" pitchFamily="34" charset="-120"/>
               </a:rPr>
-              <a:t>ELEVEN RELATED TABLES</a:t>
+              <a:t>EIGHT RELATED TABLES</a:t>
             </a:r>
             <a:endParaRPr lang="en-US" sz="1100" dirty="0"/>
           </a:p>

--- a/docs/Final_Defense_Presentation.pptx
+++ b/docs/Final_Defense_Presentation.pptx
@@ -2193,7 +2193,7 @@
           <a:p>
             <a:r>
               <a:rPr lang="en-US" dirty="0"/>
-              <a:t>If asked to name the tables: roles, users, students, companies, supervisors, internships, applications, progress_logs.</a:t>
+              <a:t>If asked to name the tables: roles, users, students, companies, supervisors, internships, applications, progress_logs, notifications.</a:t>
             </a:r>
             <a:endParaRPr lang="en-US" dirty="0"/>
           </a:p>
@@ -3587,7 +3587,7 @@
                 <a:ea typeface="Courier New" pitchFamily="34" charset="-122"/>
                 <a:cs typeface="Courier New" pitchFamily="34" charset="-120"/>
               </a:rPr>
-              <a:t>├── templates/        18 HTML pages</a:t>
+              <a:t>├── templates/        19 HTML pages</a:t>
             </a:r>
             <a:endParaRPr lang="en-US" sz="1100" dirty="0"/>
           </a:p>
@@ -3627,7 +3627,7 @@
                 <a:ea typeface="Courier New" pitchFamily="34" charset="-122"/>
                 <a:cs typeface="Courier New" pitchFamily="34" charset="-120"/>
               </a:rPr>
-              <a:t>└── tests/            29 tests</a:t>
+              <a:t>└── tests/            33 tests</a:t>
             </a:r>
             <a:endParaRPr lang="en-US" sz="1100" dirty="0"/>
           </a:p>
@@ -5873,7 +5873,7 @@
                 <a:ea typeface="Calibri" pitchFamily="34" charset="-122"/>
                 <a:cs typeface="Calibri" pitchFamily="34" charset="-120"/>
               </a:rPr>
-              <a:t>The status changes to selected on the student’s page</a:t>
+              <a:t>The student is notified of the decision</a:t>
             </a:r>
             <a:endParaRPr lang="en-US" sz="1100" dirty="0"/>
           </a:p>
@@ -6167,7 +6167,7 @@
                 <a:ea typeface="Calibri" pitchFamily="34" charset="-122"/>
                 <a:cs typeface="Calibri" pitchFamily="34" charset="-120"/>
               </a:rPr>
-              <a:t>Feedback and marks, visible on the student’s log book</a:t>
+              <a:t>Feedback and marks; the student is notified</a:t>
             </a:r>
             <a:endParaRPr lang="en-US" sz="1100" dirty="0"/>
           </a:p>
@@ -7596,7 +7596,7 @@
                 <a:ea typeface="Calibri" pitchFamily="34" charset="-122"/>
                 <a:cs typeface="Calibri" pitchFamily="34" charset="-120"/>
               </a:rPr>
-              <a:t>29 AUTOMATED TESTS, ALL PASSING</a:t>
+              <a:t>33 AUTOMATED TESTS, ALL PASSING</a:t>
             </a:r>
             <a:endParaRPr lang="en-US" sz="1100" dirty="0"/>
           </a:p>
@@ -10473,7 +10473,7 @@
                 <a:ea typeface="Cambria" pitchFamily="34" charset="-122"/>
                 <a:cs typeface="Cambria" pitchFamily="34" charset="-120"/>
               </a:rPr>
-              <a:t>29</a:t>
+              <a:t>33</a:t>
             </a:r>
             <a:endParaRPr lang="en-US" sz="5400" dirty="0"/>
           </a:p>
@@ -11123,7 +11123,7 @@
                 <a:ea typeface="Cambria" pitchFamily="34" charset="-122"/>
                 <a:cs typeface="Cambria" pitchFamily="34" charset="-120"/>
               </a:rPr>
-              <a:t>8</a:t>
+              <a:t>9</a:t>
             </a:r>
             <a:endParaRPr lang="en-US" sz="3600" dirty="0"/>
           </a:p>
@@ -11333,7 +11333,7 @@
                 <a:ea typeface="Cambria" pitchFamily="34" charset="-122"/>
                 <a:cs typeface="Cambria" pitchFamily="34" charset="-120"/>
               </a:rPr>
-              <a:t>29</a:t>
+              <a:t>30</a:t>
             </a:r>
             <a:endParaRPr lang="en-US" sz="3600" dirty="0"/>
           </a:p>
@@ -11438,7 +11438,7 @@
                 <a:ea typeface="Cambria" pitchFamily="34" charset="-122"/>
                 <a:cs typeface="Cambria" pitchFamily="34" charset="-120"/>
               </a:rPr>
-              <a:t>29</a:t>
+              <a:t>33</a:t>
             </a:r>
             <a:endParaRPr lang="en-US" sz="3600" dirty="0"/>
           </a:p>
@@ -14510,7 +14510,7 @@
                 <a:ea typeface="Cambria" pitchFamily="34" charset="-122"/>
                 <a:cs typeface="Cambria" pitchFamily="34" charset="-120"/>
               </a:rPr>
-              <a:t>Notifications by email</a:t>
+              <a:t>Email delivery</a:t>
             </a:r>
             <a:endParaRPr lang="en-US" sz="1400" dirty="0"/>
           </a:p>
@@ -14552,7 +14552,7 @@
                 <a:ea typeface="Calibri" pitchFamily="34" charset="-122"/>
                 <a:cs typeface="Calibri" pitchFamily="34" charset="-120"/>
               </a:rPr>
-              <a:t>Raise a message on each decision and deliver it by email</a:t>
+              <a:t>Send the notifications the system already generates by email</a:t>
             </a:r>
             <a:endParaRPr lang="en-US" sz="1100" dirty="0"/>
           </a:p>
@@ -20123,7 +20123,7 @@
                 <a:ea typeface="Calibri" pitchFamily="34" charset="-122"/>
                 <a:cs typeface="Calibri" pitchFamily="34" charset="-120"/>
               </a:rPr>
-              <a:t>Eight related</a:t>
+              <a:t>Nine related</a:t>
             </a:r>
             <a:endParaRPr lang="en-US" sz="1100" dirty="0"/>
           </a:p>
@@ -21395,7 +21395,7 @@
                 <a:ea typeface="Cambria" pitchFamily="34" charset="-122"/>
                 <a:cs typeface="Cambria" pitchFamily="34" charset="-120"/>
               </a:rPr>
-              <a:t>Exports and management</a:t>
+              <a:t>Notifications</a:t>
             </a:r>
             <a:endParaRPr lang="en-US" sz="1350" dirty="0"/>
           </a:p>
@@ -21437,7 +21437,7 @@
                 <a:ea typeface="Calibri" pitchFamily="34" charset="-122"/>
                 <a:cs typeface="Calibri" pitchFamily="34" charset="-120"/>
               </a:rPr>
-              <a:t>CSV export of applicants and of the searchable user list</a:t>
+              <a:t>Bell with an unread count for applications, decisions, logs and feedback</a:t>
             </a:r>
             <a:endParaRPr lang="en-US" sz="1080" dirty="0"/>
           </a:p>
@@ -21445,30 +21445,148 @@
       </p:sp>
       <p:sp>
         <p:nvSpPr>
-          <p:cNvPr id="34" name="Text 26"/>
-          <p:cNvSpPr/>
-          <p:nvPr/>
-        </p:nvSpPr>
-        <p:spPr>
-          <a:xfrm>
-            <a:off x="548640" y="6355080"/>
-            <a:ext cx="6400800" cy="274320"/>
-          </a:xfrm>
-          <a:prstGeom prst="rect">
-            <a:avLst/>
-          </a:prstGeom>
-          <a:noFill/>
-          <a:ln/>
-        </p:spPr>
-        <p:txBody>
-          <a:bodyPr wrap="square" lIns="0" tIns="0" rIns="0" bIns="0" rtlCol="0" anchor="ctr"/>
-          <a:lstStyle/>
-          <a:p>
-            <a:pPr indent="0" marL="0">
-              <a:buNone/>
-            </a:pPr>
-            <a:r>
-              <a:rPr lang="en-US" sz="900" dirty="0">
+          <p:cNvPr id="34" name="Shape 26"/>
+          <p:cNvSpPr/>
+          <p:nvPr/>
+        </p:nvSpPr>
+        <p:spPr>
+          <a:xfrm>
+            <a:off x="548640" y="5102352"/>
+            <a:ext cx="5486400" cy="1024128"/>
+          </a:xfrm>
+          <a:prstGeom prst="roundRect">
+            <a:avLst>
+              <a:gd name="adj" fmla="val 8036"/>
+            </a:avLst>
+          </a:prstGeom>
+          <a:solidFill>
+            <a:srgbClr val="F4F7FB"/>
+          </a:solidFill>
+          <a:ln w="12700">
+            <a:solidFill>
+              <a:srgbClr val="DCE4EF"/>
+            </a:solidFill>
+            <a:prstDash val="solid"/>
+          </a:ln>
+        </p:spPr>
+      </p:sp>
+      <p:sp>
+        <p:nvSpPr>
+          <p:cNvPr id="35" name="Shape 27"/>
+          <p:cNvSpPr/>
+          <p:nvPr/>
+        </p:nvSpPr>
+        <p:spPr>
+          <a:xfrm>
+            <a:off x="804672" y="5404104"/>
+            <a:ext cx="420624" cy="420624"/>
+          </a:xfrm>
+          <a:prstGeom prst="ellipse">
+            <a:avLst/>
+          </a:prstGeom>
+          <a:solidFill>
+            <a:srgbClr val="12294D"/>
+          </a:solidFill>
+          <a:ln w="12700">
+            <a:solidFill>
+              <a:srgbClr val="12294D"/>
+            </a:solidFill>
+            <a:prstDash val="solid"/>
+          </a:ln>
+        </p:spPr>
+      </p:sp>
+      <p:pic>
+        <p:nvPicPr>
+          <p:cNvPr id="36" name="Image 6" descr="preencoded.png">    </p:cNvPr>
+          <p:cNvPicPr>
+            <a:picLocks noChangeAspect="1"/>
+          </p:cNvPicPr>
+          <p:nvPr/>
+        </p:nvPicPr>
+        <p:blipFill>
+          <a:blip r:embed="rId7"/>
+          <a:stretch>
+            <a:fillRect/>
+          </a:stretch>
+        </p:blipFill>
+        <p:spPr>
+          <a:xfrm>
+            <a:off x="905622" y="5505054"/>
+            <a:ext cx="218724" cy="218724"/>
+          </a:xfrm>
+          <a:prstGeom prst="rect">
+            <a:avLst/>
+          </a:prstGeom>
+        </p:spPr>
+      </p:pic>
+      <p:sp>
+        <p:nvSpPr>
+          <p:cNvPr id="37" name="Text 28"/>
+          <p:cNvSpPr/>
+          <p:nvPr/>
+        </p:nvSpPr>
+        <p:spPr>
+          <a:xfrm>
+            <a:off x="1389888" y="5285232"/>
+            <a:ext cx="4480560" cy="274320"/>
+          </a:xfrm>
+          <a:prstGeom prst="rect">
+            <a:avLst/>
+          </a:prstGeom>
+          <a:noFill/>
+          <a:ln/>
+        </p:spPr>
+        <p:txBody>
+          <a:bodyPr wrap="square" lIns="0" tIns="0" rIns="0" bIns="0" rtlCol="0" anchor="ctr"/>
+          <a:lstStyle/>
+          <a:p>
+            <a:pPr indent="0" marL="0">
+              <a:buNone/>
+            </a:pPr>
+            <a:r>
+              <a:rPr lang="en-US" sz="1350" b="1" dirty="0">
+                <a:solidFill>
+                  <a:srgbClr val="12294D"/>
+                </a:solidFill>
+                <a:latin typeface="Cambria" pitchFamily="34" charset="0"/>
+                <a:ea typeface="Cambria" pitchFamily="34" charset="-122"/>
+                <a:cs typeface="Cambria" pitchFamily="34" charset="-120"/>
+              </a:rPr>
+              <a:t>Exports and management</a:t>
+            </a:r>
+            <a:endParaRPr lang="en-US" sz="1350" dirty="0"/>
+          </a:p>
+        </p:txBody>
+      </p:sp>
+      <p:sp>
+        <p:nvSpPr>
+          <p:cNvPr id="38" name="Text 29"/>
+          <p:cNvSpPr/>
+          <p:nvPr/>
+        </p:nvSpPr>
+        <p:spPr>
+          <a:xfrm>
+            <a:off x="1389888" y="5577840"/>
+            <a:ext cx="4480560" cy="457200"/>
+          </a:xfrm>
+          <a:prstGeom prst="rect">
+            <a:avLst/>
+          </a:prstGeom>
+          <a:noFill/>
+          <a:ln/>
+        </p:spPr>
+        <p:txBody>
+          <a:bodyPr wrap="square" lIns="0" tIns="0" rIns="0" bIns="0" rtlCol="0" anchor="ctr"/>
+          <a:lstStyle/>
+          <a:p>
+            <a:pPr indent="0" marL="0">
+              <a:lnSpc>
+                <a:spcPts val="1400"/>
+              </a:lnSpc>
+              <a:buNone/>
+            </a:pPr>
+            <a:r>
+              <a:rPr lang="en-US" sz="1080" dirty="0">
                 <a:solidFill>
                   <a:srgbClr val="6B7686"/>
                 </a:solidFill>
@@ -21476,6 +21594,45 @@
                 <a:ea typeface="Calibri" pitchFamily="34" charset="-122"/>
                 <a:cs typeface="Calibri" pitchFamily="34" charset="-120"/>
               </a:rPr>
+              <a:t>CSV export of applicants and of the searchable user list</a:t>
+            </a:r>
+            <a:endParaRPr lang="en-US" sz="1080" dirty="0"/>
+          </a:p>
+        </p:txBody>
+      </p:sp>
+      <p:sp>
+        <p:nvSpPr>
+          <p:cNvPr id="39" name="Text 30"/>
+          <p:cNvSpPr/>
+          <p:nvPr/>
+        </p:nvSpPr>
+        <p:spPr>
+          <a:xfrm>
+            <a:off x="548640" y="6355080"/>
+            <a:ext cx="6400800" cy="274320"/>
+          </a:xfrm>
+          <a:prstGeom prst="rect">
+            <a:avLst/>
+          </a:prstGeom>
+          <a:noFill/>
+          <a:ln/>
+        </p:spPr>
+        <p:txBody>
+          <a:bodyPr wrap="square" lIns="0" tIns="0" rIns="0" bIns="0" rtlCol="0" anchor="ctr"/>
+          <a:lstStyle/>
+          <a:p>
+            <a:pPr indent="0" marL="0">
+              <a:buNone/>
+            </a:pPr>
+            <a:r>
+              <a:rPr lang="en-US" sz="900" dirty="0">
+                <a:solidFill>
+                  <a:srgbClr val="6B7686"/>
+                </a:solidFill>
+                <a:latin typeface="Calibri" pitchFamily="34" charset="0"/>
+                <a:ea typeface="Calibri" pitchFamily="34" charset="-122"/>
+                <a:cs typeface="Calibri" pitchFamily="34" charset="-120"/>
+              </a:rPr>
               <a:t>Internship Portal  ·  Final Project Defense</a:t>
             </a:r>
             <a:endParaRPr lang="en-US" sz="900" dirty="0"/>
@@ -21484,7 +21641,7 @@
       </p:sp>
       <p:sp>
         <p:nvSpPr>
-          <p:cNvPr id="35" name="Text 27"/>
+          <p:cNvPr id="40" name="Text 31"/>
           <p:cNvSpPr/>
           <p:nvPr/>
         </p:nvSpPr>
@@ -22395,7 +22552,7 @@
                 <a:ea typeface="Calibri" pitchFamily="34" charset="-122"/>
                 <a:cs typeface="Calibri" pitchFamily="34" charset="-120"/>
               </a:rPr>
-              <a:t>MySQL — eight related tables</a:t>
+              <a:t>MySQL — nine related tables</a:t>
             </a:r>
             <a:endParaRPr lang="en-US" sz="1150" dirty="0"/>
           </a:p>
@@ -22650,7 +22807,7 @@
                 <a:ea typeface="Calibri" pitchFamily="34" charset="-122"/>
                 <a:cs typeface="Calibri" pitchFamily="34" charset="-120"/>
               </a:rPr>
-              <a:t>pytest — 29 tests</a:t>
+              <a:t>pytest — 33 tests</a:t>
             </a:r>
             <a:endParaRPr lang="en-US" sz="1150" dirty="0"/>
           </a:p>
@@ -23736,7 +23893,7 @@
                 <a:ea typeface="Calibri" pitchFamily="34" charset="-122"/>
                 <a:cs typeface="Calibri" pitchFamily="34" charset="-120"/>
               </a:rPr>
-              <a:t>EIGHT RELATED TABLES</a:t>
+              <a:t>NINE RELATED TABLES</a:t>
             </a:r>
             <a:endParaRPr lang="en-US" sz="1100" dirty="0"/>
           </a:p>
